--- a/lessons-v2/day11/day11.pptx
+++ b/lessons-v2/day11/day11.pptx
@@ -23,9 +23,11 @@
     <p:sldId id="271" r:id="rId17"/>
     <p:sldId id="272" r:id="rId18"/>
     <p:sldId id="273" r:id="rId19"/>
+    <p:sldId id="274" r:id="rId20"/>
+    <p:sldId id="275" r:id="rId21"/>
   </p:sldIdLst>
   <p:notesMasterIdLst>
-    <p:notesMasterId r:id="rId20"/>
+    <p:notesMasterId r:id="rId22"/>
   </p:notesMasterIdLst>
   <p:sldSz cx="12192000" cy="6858000"/>
   <p:notesSz cx="6858000" cy="12192000"/>
@@ -519,22 +521,27 @@
           <a:p>
             <a:r>
               <a:rPr lang="en-US" dirty="0"/>
-              <a:t>RUN SHEET (~85 min). Hands-on: phishing dissection, HIBP, a connection-log analysis.
+              <a:t>RUN SHEET (~85 min). Hands-on: phishing dissection, a connection-log analysis, then the LAB KICKOFF.
 00:00 Journey check + hook (spot the phish)                    4
 00:04 The short list — how attackers get in                    5
 00:09 Social engineering &amp; phishing (#1)                       9
 00:18 DO: dissect a phishing email                             8
 00:26 Credential attacks                                       7
-00:33 DO: check yourself on HIBP                                4
-00:37 Malware families — by behaviour, not "virus"            10
-00:47 DO: spot the C2 beacon in a connection log               8
-00:55 MITM, DoS/DDoS, supply chain                             6
-01:01 Attack &lt;-&gt; defence: the 6 ways in (the artifact)         6
-01:07 "We'd notice" — dwell time                               4
-01:11 Wrap + homework                                          4
-CUT FIRST IF SHORT: MITM/DoS/supply-chain slide to 3 min (mostly callbacks); the HIBP DO.
+      (HIBP check = HOMEWORK by default, to make room for the lab)
+00:33 Malware families — by behaviour, not "virus"            10
+00:43 DO: spot the C2 beacon in a connection log               8
+00:51 MITM, DoS/DDoS, supply chain (kept to 3 min)             3
+00:54 Attack &lt;-&gt; defence: the 6 ways in (the artifact)         6
+01:00 "We'd notice" — dwell time                               4
+01:04 LAB KICKOFF: the map (2 diagrams) + start Step 1          12
+01:16 Wrap + homework                                          5
+CUT FIRST IF SHORT: the C2 DO to 5 min (do the beacon as a class); the credential sub-types.
 NEVER CUT: the short list, phishing anatomy + the dissection DO, the malware behaviour taxonomy,
-the 6-ways-in table, dwell time.
+the 6-ways-in table, dwell time, the lab-map diagram walk-through (it frames Days 12-15).
+LIVE DIAGRAMS (folder archify/ — open both in browser tabs BEFORE class; each has view buttons
+that step through the story, and a light/dark toggle for the projector):
+  01-lab-architecture.html -&gt; 'Your lab' slide (3 views: three networks / attack path / kept private)
+  02-scan-traffic.html     -&gt; same slide, after the map (3 views: find it / knock on ports / read + look up)
 ANALOGY (kitchen): the ways a thief gets into the restaurant — talks past the host (phishing),
 uses a copied key (stolen creds), the back door nobody fixed (unpatched), a window left open
 (misconfig), a poisoned delivery (supply chain), jamming the phone lines (DoS). Malware = what
@@ -626,9 +633,10 @@
           <a:p>
             <a:r>
               <a:rPr lang="en-US" dirty="0"/>
-              <a:t>4 min. HIBP is Troy Hunt's breach-aggregation service — safe, reputable, no password entry.
-Most students will have 2-10 hits. Make the action concrete: the reused ones are the danger.
-CUT this DO first if short — but it lands hard, try to keep it.</a:t>
+              <a:t>HOMEWORK by default now (the lab kickoff needs the time). 30 s to set it up: HIBP is Troy Hunt's
+breach-aggregation service — safe, reputable, email only, never a password. Most students will
+have 2-10 hits. Make the action concrete: the reused ones are the danger.
+If you finish early, run it in class (4 min).</a:t>
             </a:r>
             <a:endParaRPr lang="en-US" dirty="0"/>
           </a:p>
@@ -897,7 +905,7 @@
             <a:r>
               <a:rPr lang="en-US" dirty="0"/>
               <a:t>Mostly callbacks — keep it brisk. Supply chain is the scariest because the malicious code
-arrives *signed and trusted*. CUT to 3 min if behind.</a:t>
+arrives *signed and trusted*. Keep to 3 min today (lab kickoff needs the time).</a:t>
             </a:r>
             <a:endParaRPr lang="en-US" dirty="0"/>
           </a:p>
@@ -1164,7 +1172,22 @@
           <a:p>
             <a:r>
               <a:rPr lang="en-US" dirty="0"/>
-              <a:t/>
+              <a:t>~7 min. Kitchen analogy: a PRACTICE restaurant built inside our own building, walled off so nobody
+can walk in from the street. We break into it on purpose; nobody real gets hurt.
+DIAGRAM 1 — 01-lab-architecture.html (click the view buttons):
+  view 1 'Three networks': one laptop, THREE addresses — Windows 192.168.x.x (your real Wi-Fi),
+    WSL Ubuntu 172.x.x.x (the attacker box), the lab 10.89.1.0/24 (exists only inside the laptop).
+    Callback to Day 3 'three addresses': same idea, now all in one machine.
+  view 2 'Your attack path': every scan starts in Ubuntu, crosses the lab network, lands on a
+    target's OWN IP and REAL port. 10.89.1.10 = a whole server (many ports); .20 and .30 = web apps.
+  view 3 'Kept private': Wi-Fi never sees the targets. That is why it's safe — and why we never
+    forward them to a real network (Day 1: authorization).
+DIAGRAM 2 — 02-scan-traffic.html: walk the four bands — (1) ARP 'who has 10.89.1.10?' (same
+  network, no router needed); (2) SYN -&gt; SYN-ACK = open, SYN -&gt; RST = closed (Day 4's handshake,
+  nmap just doesn't finish it); (3) connect + banner 'vsFTPd 2.3.4'; (4) searchsploit that string
+  offline. 'That's a whole scan — recon, port scan, version, assess. Days 12-15 do exactly this.'
+  Exploitation comes later and rides the same path. Don't drill the details today.
+Class check cards on each diagram double as the exit questions.</a:t>
             </a:r>
             <a:endParaRPr lang="en-US" dirty="0"/>
           </a:p>
@@ -1252,7 +1275,11 @@
           <a:p>
             <a:r>
               <a:rPr lang="en-US" dirty="0"/>
-              <a:t>Due start of Day 12.</a:t>
+              <a:t>~5 min. Only Step 1 happens in class; everything else is homework. Walk the room: the common
+blocker is VIRTUALIZATION DISABLED in BIOS/UEFI (Intel VT-x / AMD-V) — note it, they fix it at home
+(guide's troubleshooting has the line). Mac users: point them at the VM route. Remind them the
+reboot is needed before Ubuntu opens. Don't stand there while 25 laptops download — it's homework.
+Gate: Days 12-15 use THIS lab. Anyone who can't finish → office hours / shared class lab.</a:t>
             </a:r>
             <a:endParaRPr lang="en-US" dirty="0"/>
           </a:p>
@@ -1340,8 +1367,7 @@
           <a:p>
             <a:r>
               <a:rPr lang="en-US" dirty="0"/>
-              <a:t>Say the three lines. Tomorrow: we turn "here are the attacks" into "here is the repeatable
-process an attacker (and a pentester) follows" — the lifecycle — and we stand up the lab.</a:t>
+              <a:t/>
             </a:r>
             <a:endParaRPr lang="en-US" dirty="0"/>
           </a:p>
@@ -1365,6 +1391,94 @@
             <a:fld id="{F7021451-1387-4CA6-816F-3879F97B5CBC}" type="slidenum">
               <a:rPr lang="en-US"/>
               <a:t>18</a:t>
+            </a:fld>
+            <a:endParaRPr lang="en-US"/>
+          </a:p>
+        </p:txBody>
+      </p:sp>
+    </p:spTree>
+    <p:extLst>
+      <p:ext uri="{BB962C8B-B14F-4D97-AF65-F5344CB8AC3E}">
+        <p14:creationId xmlns:p14="http://schemas.microsoft.com/office/powerpoint/2010/main" val="1024086991"/>
+      </p:ext>
+    </p:extLst>
+  </p:cSld>
+  <p:clrMapOvr>
+    <a:masterClrMapping/>
+  </p:clrMapOvr>
+</p:notes>
+</file>
+
+<file path=ppt/notesSlides/notesSlide19.xml><?xml version="1.0" encoding="utf-8"?>
+<p:notes xmlns:a="http://schemas.openxmlformats.org/drawingml/2006/main" xmlns:r="http://schemas.openxmlformats.org/officeDocument/2006/relationships" xmlns:p="http://schemas.openxmlformats.org/presentationml/2006/main">
+  <p:cSld>
+    <p:spTree>
+      <p:nvGrpSpPr>
+        <p:cNvPr id="1" name=""/>
+        <p:cNvGrpSpPr/>
+        <p:nvPr/>
+      </p:nvGrpSpPr>
+      <p:grpSpPr>
+        <a:xfrm>
+          <a:off x="0" y="0"/>
+          <a:ext cx="0" cy="0"/>
+          <a:chOff x="0" y="0"/>
+          <a:chExt cx="0" cy="0"/>
+        </a:xfrm>
+      </p:grpSpPr>
+      <p:sp>
+        <p:nvSpPr>
+          <p:cNvPr id="2" name="Slide Image Placeholder 1"/>
+          <p:cNvSpPr>
+            <a:spLocks noGrp="1" noRot="1" noChangeAspect="1"/>
+          </p:cNvSpPr>
+          <p:nvPr>
+            <p:ph type="sldImg"/>
+          </p:nvPr>
+        </p:nvSpPr>
+        <p:spPr/>
+      </p:sp>
+      <p:sp>
+        <p:nvSpPr>
+          <p:cNvPr id="3" name="Notes Placeholder 2"/>
+          <p:cNvSpPr>
+            <a:spLocks noGrp="1"/>
+          </p:cNvSpPr>
+          <p:nvPr>
+            <p:ph type="body" idx="1"/>
+          </p:nvPr>
+        </p:nvSpPr>
+        <p:spPr/>
+        <p:txBody>
+          <a:bodyPr/>
+          <a:lstStyle/>
+          <a:p>
+            <a:r>
+              <a:rPr lang="en-US" dirty="0"/>
+              <a:t>Due start of Day 12.</a:t>
+            </a:r>
+            <a:endParaRPr lang="en-US" dirty="0"/>
+          </a:p>
+        </p:txBody>
+      </p:sp>
+      <p:sp>
+        <p:nvSpPr>
+          <p:cNvPr id="4" name="Slide Number Placeholder 3"/>
+          <p:cNvSpPr>
+            <a:spLocks noGrp="1"/>
+          </p:cNvSpPr>
+          <p:nvPr>
+            <p:ph type="sldNum" sz="quarter" idx="10"/>
+          </p:nvPr>
+        </p:nvSpPr>
+        <p:spPr/>
+        <p:txBody>
+          <a:bodyPr/>
+          <a:lstStyle/>
+          <a:p>
+            <a:fld id="{F7021451-1387-4CA6-816F-3879F97B5CBC}" type="slidenum">
+              <a:rPr lang="en-US"/>
+              <a:t>19</a:t>
             </a:fld>
             <a:endParaRPr lang="en-US"/>
           </a:p>
@@ -1454,6 +1568,96 @@
             <a:fld id="{F7021451-1387-4CA6-816F-3879F97B5CBC}" type="slidenum">
               <a:rPr lang="en-US"/>
               <a:t>2</a:t>
+            </a:fld>
+            <a:endParaRPr lang="en-US"/>
+          </a:p>
+        </p:txBody>
+      </p:sp>
+    </p:spTree>
+    <p:extLst>
+      <p:ext uri="{BB962C8B-B14F-4D97-AF65-F5344CB8AC3E}">
+        <p14:creationId xmlns:p14="http://schemas.microsoft.com/office/powerpoint/2010/main" val="1024086991"/>
+      </p:ext>
+    </p:extLst>
+  </p:cSld>
+  <p:clrMapOvr>
+    <a:masterClrMapping/>
+  </p:clrMapOvr>
+</p:notes>
+</file>
+
+<file path=ppt/notesSlides/notesSlide20.xml><?xml version="1.0" encoding="utf-8"?>
+<p:notes xmlns:a="http://schemas.openxmlformats.org/drawingml/2006/main" xmlns:r="http://schemas.openxmlformats.org/officeDocument/2006/relationships" xmlns:p="http://schemas.openxmlformats.org/presentationml/2006/main">
+  <p:cSld>
+    <p:spTree>
+      <p:nvGrpSpPr>
+        <p:cNvPr id="1" name=""/>
+        <p:cNvGrpSpPr/>
+        <p:nvPr/>
+      </p:nvGrpSpPr>
+      <p:grpSpPr>
+        <a:xfrm>
+          <a:off x="0" y="0"/>
+          <a:ext cx="0" cy="0"/>
+          <a:chOff x="0" y="0"/>
+          <a:chExt cx="0" cy="0"/>
+        </a:xfrm>
+      </p:grpSpPr>
+      <p:sp>
+        <p:nvSpPr>
+          <p:cNvPr id="2" name="Slide Image Placeholder 1"/>
+          <p:cNvSpPr>
+            <a:spLocks noGrp="1" noRot="1" noChangeAspect="1"/>
+          </p:cNvSpPr>
+          <p:nvPr>
+            <p:ph type="sldImg"/>
+          </p:nvPr>
+        </p:nvSpPr>
+        <p:spPr/>
+      </p:sp>
+      <p:sp>
+        <p:nvSpPr>
+          <p:cNvPr id="3" name="Notes Placeholder 2"/>
+          <p:cNvSpPr>
+            <a:spLocks noGrp="1"/>
+          </p:cNvSpPr>
+          <p:nvPr>
+            <p:ph type="body" idx="1"/>
+          </p:nvPr>
+        </p:nvSpPr>
+        <p:spPr/>
+        <p:txBody>
+          <a:bodyPr/>
+          <a:lstStyle/>
+          <a:p>
+            <a:r>
+              <a:rPr lang="en-US" dirty="0"/>
+              <a:t>Say the three lines. Tomorrow: we turn "here are the attacks" into "here is the repeatable
+process an attacker (and a pentester) follows" — the lifecycle — and use the lab they start
+building tonight.</a:t>
+            </a:r>
+            <a:endParaRPr lang="en-US" dirty="0"/>
+          </a:p>
+        </p:txBody>
+      </p:sp>
+      <p:sp>
+        <p:nvSpPr>
+          <p:cNvPr id="4" name="Slide Number Placeholder 3"/>
+          <p:cNvSpPr>
+            <a:spLocks noGrp="1"/>
+          </p:cNvSpPr>
+          <p:nvPr>
+            <p:ph type="sldNum" sz="quarter" idx="10"/>
+          </p:nvPr>
+        </p:nvSpPr>
+        <p:spPr/>
+        <p:txBody>
+          <a:bodyPr/>
+          <a:lstStyle/>
+          <a:p>
+            <a:fld id="{F7021451-1387-4CA6-816F-3879F97B5CBC}" type="slidenum">
+              <a:rPr lang="en-US"/>
+              <a:t>20</a:t>
             </a:fld>
             <a:endParaRPr lang="en-US"/>
           </a:p>
@@ -2796,9 +3000,87 @@
 </p:sld>
 </file>
 
+<file path=ppt/slides/slide19.xml><?xml version="1.0" encoding="utf-8"?>
+<p:sld xmlns:a="http://schemas.openxmlformats.org/drawingml/2006/main" xmlns:r="http://schemas.openxmlformats.org/officeDocument/2006/relationships" xmlns:p="http://schemas.openxmlformats.org/presentationml/2006/main">
+  <p:cSld name="Slide 19">
+    <p:bg>
+      <p:bgPr>
+        <a:blipFill dpi="0" rotWithShape="1">
+          <a:blip r:embed="rId1">
+            <a:lum/>
+          </a:blip>
+          <a:srcRect/>
+          <a:stretch>
+            <a:fillRect/>
+          </a:stretch>
+        </a:blipFill>
+        <a:effectLst/>
+      </p:bgPr>
+    </p:bg>
+    <p:spTree>
+      <p:nvGrpSpPr>
+        <p:cNvPr id="1" name=""/>
+        <p:cNvGrpSpPr/>
+        <p:nvPr/>
+      </p:nvGrpSpPr>
+      <p:grpSpPr>
+        <a:xfrm>
+          <a:off x="0" y="0"/>
+          <a:ext cx="0" cy="0"/>
+          <a:chOff x="0" y="0"/>
+          <a:chExt cx="0" cy="0"/>
+        </a:xfrm>
+      </p:grpSpPr>
+    </p:spTree>
+  </p:cSld>
+  <p:clrMapOvr>
+    <a:masterClrMapping/>
+  </p:clrMapOvr>
+</p:sld>
+</file>
+
 <file path=ppt/slides/slide2.xml><?xml version="1.0" encoding="utf-8"?>
 <p:sld xmlns:a="http://schemas.openxmlformats.org/drawingml/2006/main" xmlns:r="http://schemas.openxmlformats.org/officeDocument/2006/relationships" xmlns:p="http://schemas.openxmlformats.org/presentationml/2006/main">
   <p:cSld name="Slide 2">
+    <p:bg>
+      <p:bgPr>
+        <a:blipFill dpi="0" rotWithShape="1">
+          <a:blip r:embed="rId1">
+            <a:lum/>
+          </a:blip>
+          <a:srcRect/>
+          <a:stretch>
+            <a:fillRect/>
+          </a:stretch>
+        </a:blipFill>
+        <a:effectLst/>
+      </p:bgPr>
+    </p:bg>
+    <p:spTree>
+      <p:nvGrpSpPr>
+        <p:cNvPr id="1" name=""/>
+        <p:cNvGrpSpPr/>
+        <p:nvPr/>
+      </p:nvGrpSpPr>
+      <p:grpSpPr>
+        <a:xfrm>
+          <a:off x="0" y="0"/>
+          <a:ext cx="0" cy="0"/>
+          <a:chOff x="0" y="0"/>
+          <a:chExt cx="0" cy="0"/>
+        </a:xfrm>
+      </p:grpSpPr>
+    </p:spTree>
+  </p:cSld>
+  <p:clrMapOvr>
+    <a:masterClrMapping/>
+  </p:clrMapOvr>
+</p:sld>
+</file>
+
+<file path=ppt/slides/slide20.xml><?xml version="1.0" encoding="utf-8"?>
+<p:sld xmlns:a="http://schemas.openxmlformats.org/drawingml/2006/main" xmlns:r="http://schemas.openxmlformats.org/officeDocument/2006/relationships" xmlns:p="http://schemas.openxmlformats.org/presentationml/2006/main">
+  <p:cSld name="Slide 20">
     <p:bg>
       <p:bgPr>
         <a:blipFill dpi="0" rotWithShape="1">
